--- a/outputs/produkte/mama-ceo/03-praesentationen/saeule-5/02-lektion-5-2.pptx
+++ b/outputs/produkte/mama-ceo/03-praesentationen/saeule-5/02-lektion-5-2.pptx
@@ -4282,6 +4282,14 @@
 <file path=ppt/slides/slide1.xml><?xml version="1.0" encoding="utf-8"?>
 <p:sld xmlns:a="http://schemas.openxmlformats.org/drawingml/2006/main" xmlns:p="http://schemas.openxmlformats.org/presentationml/2006/main" xmlns:r="http://schemas.openxmlformats.org/officeDocument/2006/relationships">
   <p:cSld>
+    <p:bg>
+      <p:bgPr>
+        <a:solidFill>
+          <a:srgbClr val="F1ECDD"/>
+        </a:solidFill>
+        <a:effectLst/>
+      </p:bgPr>
+    </p:bg>
     <p:spTree>
       <p:nvGrpSpPr>
         <p:cNvPr id="1" name=""/>
@@ -4557,6 +4565,14 @@
 <file path=ppt/slides/slide10.xml><?xml version="1.0" encoding="utf-8"?>
 <p:sld xmlns:a="http://schemas.openxmlformats.org/drawingml/2006/main" xmlns:p="http://schemas.openxmlformats.org/presentationml/2006/main" xmlns:r="http://schemas.openxmlformats.org/officeDocument/2006/relationships">
   <p:cSld>
+    <p:bg>
+      <p:bgPr>
+        <a:solidFill>
+          <a:srgbClr val="F1ECDD"/>
+        </a:solidFill>
+        <a:effectLst/>
+      </p:bgPr>
+    </p:bg>
     <p:spTree>
       <p:nvGrpSpPr>
         <p:cNvPr id="1" name=""/>
@@ -4632,7 +4648,7 @@
                 </a:solidFill>
                 <a:latin typeface="Calibri"/>
               </a:rPr>
-              <a:t>▸  </a:t>
+              <a:t>✓  </a:t>
             </a:r>
             <a:r>
               <a:rPr sz="1600" b="0">
@@ -4657,7 +4673,7 @@
                 </a:solidFill>
                 <a:latin typeface="Calibri"/>
               </a:rPr>
-              <a:t>▸  </a:t>
+              <a:t>✓  </a:t>
             </a:r>
             <a:r>
               <a:rPr sz="1600" b="0">
@@ -4682,7 +4698,7 @@
                 </a:solidFill>
                 <a:latin typeface="Calibri"/>
               </a:rPr>
-              <a:t>▸  </a:t>
+              <a:t>✓  </a:t>
             </a:r>
             <a:r>
               <a:rPr sz="1600" b="0">
@@ -4776,6 +4792,14 @@
 <file path=ppt/slides/slide11.xml><?xml version="1.0" encoding="utf-8"?>
 <p:sld xmlns:a="http://schemas.openxmlformats.org/drawingml/2006/main" xmlns:p="http://schemas.openxmlformats.org/presentationml/2006/main" xmlns:r="http://schemas.openxmlformats.org/officeDocument/2006/relationships">
   <p:cSld>
+    <p:bg>
+      <p:bgPr>
+        <a:solidFill>
+          <a:srgbClr val="F1ECDD"/>
+        </a:solidFill>
+        <a:effectLst/>
+      </p:bgPr>
+    </p:bg>
     <p:spTree>
       <p:nvGrpSpPr>
         <p:cNvPr id="1" name=""/>
@@ -4851,7 +4875,7 @@
                 </a:solidFill>
                 <a:latin typeface="Calibri"/>
               </a:rPr>
-              <a:t>▸  </a:t>
+              <a:t>✓  </a:t>
             </a:r>
             <a:r>
               <a:rPr sz="1600" b="0">
@@ -4876,7 +4900,7 @@
                 </a:solidFill>
                 <a:latin typeface="Calibri"/>
               </a:rPr>
-              <a:t>▸  </a:t>
+              <a:t>✓  </a:t>
             </a:r>
             <a:r>
               <a:rPr sz="1600" b="0">
@@ -4901,7 +4925,7 @@
                 </a:solidFill>
                 <a:latin typeface="Calibri"/>
               </a:rPr>
-              <a:t>▸  </a:t>
+              <a:t>✓  </a:t>
             </a:r>
             <a:r>
               <a:rPr sz="1600" b="0">
@@ -4995,6 +5019,14 @@
 <file path=ppt/slides/slide12.xml><?xml version="1.0" encoding="utf-8"?>
 <p:sld xmlns:a="http://schemas.openxmlformats.org/drawingml/2006/main" xmlns:p="http://schemas.openxmlformats.org/presentationml/2006/main" xmlns:r="http://schemas.openxmlformats.org/officeDocument/2006/relationships">
   <p:cSld>
+    <p:bg>
+      <p:bgPr>
+        <a:solidFill>
+          <a:srgbClr val="F1ECDD"/>
+        </a:solidFill>
+        <a:effectLst/>
+      </p:bgPr>
+    </p:bg>
     <p:spTree>
       <p:nvGrpSpPr>
         <p:cNvPr id="1" name=""/>
@@ -5070,7 +5102,7 @@
                 </a:solidFill>
                 <a:latin typeface="Calibri"/>
               </a:rPr>
-              <a:t>▸  </a:t>
+              <a:t>✓  </a:t>
             </a:r>
             <a:r>
               <a:rPr sz="1600" b="0">
@@ -5095,7 +5127,7 @@
                 </a:solidFill>
                 <a:latin typeface="Calibri"/>
               </a:rPr>
-              <a:t>▸  </a:t>
+              <a:t>✓  </a:t>
             </a:r>
             <a:r>
               <a:rPr sz="1600" b="0">
@@ -5189,6 +5221,14 @@
 <file path=ppt/slides/slide2.xml><?xml version="1.0" encoding="utf-8"?>
 <p:sld xmlns:a="http://schemas.openxmlformats.org/drawingml/2006/main" xmlns:p="http://schemas.openxmlformats.org/presentationml/2006/main" xmlns:r="http://schemas.openxmlformats.org/officeDocument/2006/relationships">
   <p:cSld>
+    <p:bg>
+      <p:bgPr>
+        <a:solidFill>
+          <a:srgbClr val="F1ECDD"/>
+        </a:solidFill>
+        <a:effectLst/>
+      </p:bgPr>
+    </p:bg>
     <p:spTree>
       <p:nvGrpSpPr>
         <p:cNvPr id="1" name=""/>
@@ -5264,7 +5304,7 @@
                 </a:solidFill>
                 <a:latin typeface="Calibri"/>
               </a:rPr>
-              <a:t>▸  </a:t>
+              <a:t>✓  </a:t>
             </a:r>
             <a:r>
               <a:rPr sz="1600" b="0">
@@ -5289,7 +5329,7 @@
                 </a:solidFill>
                 <a:latin typeface="Calibri"/>
               </a:rPr>
-              <a:t>▸  </a:t>
+              <a:t>✓  </a:t>
             </a:r>
             <a:r>
               <a:rPr sz="1600" b="0">
@@ -5314,7 +5354,7 @@
                 </a:solidFill>
                 <a:latin typeface="Calibri"/>
               </a:rPr>
-              <a:t>▸  </a:t>
+              <a:t>✓  </a:t>
             </a:r>
             <a:r>
               <a:rPr sz="1600" b="0">
@@ -5408,6 +5448,14 @@
 <file path=ppt/slides/slide3.xml><?xml version="1.0" encoding="utf-8"?>
 <p:sld xmlns:a="http://schemas.openxmlformats.org/drawingml/2006/main" xmlns:p="http://schemas.openxmlformats.org/presentationml/2006/main" xmlns:r="http://schemas.openxmlformats.org/officeDocument/2006/relationships">
   <p:cSld>
+    <p:bg>
+      <p:bgPr>
+        <a:solidFill>
+          <a:srgbClr val="F1ECDD"/>
+        </a:solidFill>
+        <a:effectLst/>
+      </p:bgPr>
+    </p:bg>
     <p:spTree>
       <p:nvGrpSpPr>
         <p:cNvPr id="1" name=""/>
@@ -5483,7 +5531,7 @@
                 </a:solidFill>
                 <a:latin typeface="Calibri"/>
               </a:rPr>
-              <a:t>▸  </a:t>
+              <a:t>✓  </a:t>
             </a:r>
             <a:r>
               <a:rPr sz="1600" b="0">
@@ -5508,7 +5556,7 @@
                 </a:solidFill>
                 <a:latin typeface="Calibri"/>
               </a:rPr>
-              <a:t>▸  </a:t>
+              <a:t>✓  </a:t>
             </a:r>
             <a:r>
               <a:rPr sz="1600" b="0">
@@ -5533,7 +5581,7 @@
                 </a:solidFill>
                 <a:latin typeface="Calibri"/>
               </a:rPr>
-              <a:t>▸  </a:t>
+              <a:t>✓  </a:t>
             </a:r>
             <a:r>
               <a:rPr sz="1600" b="0">
@@ -5627,6 +5675,14 @@
 <file path=ppt/slides/slide4.xml><?xml version="1.0" encoding="utf-8"?>
 <p:sld xmlns:a="http://schemas.openxmlformats.org/drawingml/2006/main" xmlns:p="http://schemas.openxmlformats.org/presentationml/2006/main" xmlns:r="http://schemas.openxmlformats.org/officeDocument/2006/relationships">
   <p:cSld>
+    <p:bg>
+      <p:bgPr>
+        <a:solidFill>
+          <a:srgbClr val="F1ECDD"/>
+        </a:solidFill>
+        <a:effectLst/>
+      </p:bgPr>
+    </p:bg>
     <p:spTree>
       <p:nvGrpSpPr>
         <p:cNvPr id="1" name=""/>
@@ -5702,7 +5758,7 @@
                 </a:solidFill>
                 <a:latin typeface="Calibri"/>
               </a:rPr>
-              <a:t>▸  </a:t>
+              <a:t>✓  </a:t>
             </a:r>
             <a:r>
               <a:rPr sz="1600" b="0">
@@ -5727,7 +5783,7 @@
                 </a:solidFill>
                 <a:latin typeface="Calibri"/>
               </a:rPr>
-              <a:t>▸  </a:t>
+              <a:t>✓  </a:t>
             </a:r>
             <a:r>
               <a:rPr sz="1600" b="0">
@@ -5752,7 +5808,7 @@
                 </a:solidFill>
                 <a:latin typeface="Calibri"/>
               </a:rPr>
-              <a:t>▸  </a:t>
+              <a:t>✓  </a:t>
             </a:r>
             <a:r>
               <a:rPr sz="1600" b="0">
@@ -5846,6 +5902,14 @@
 <file path=ppt/slides/slide5.xml><?xml version="1.0" encoding="utf-8"?>
 <p:sld xmlns:a="http://schemas.openxmlformats.org/drawingml/2006/main" xmlns:p="http://schemas.openxmlformats.org/presentationml/2006/main" xmlns:r="http://schemas.openxmlformats.org/officeDocument/2006/relationships">
   <p:cSld>
+    <p:bg>
+      <p:bgPr>
+        <a:solidFill>
+          <a:srgbClr val="F1ECDD"/>
+        </a:solidFill>
+        <a:effectLst/>
+      </p:bgPr>
+    </p:bg>
     <p:spTree>
       <p:nvGrpSpPr>
         <p:cNvPr id="1" name=""/>
@@ -5921,7 +5985,7 @@
                 </a:solidFill>
                 <a:latin typeface="Calibri"/>
               </a:rPr>
-              <a:t>▸  </a:t>
+              <a:t>✓  </a:t>
             </a:r>
             <a:r>
               <a:rPr sz="1600" b="0">
@@ -5946,7 +6010,7 @@
                 </a:solidFill>
                 <a:latin typeface="Calibri"/>
               </a:rPr>
-              <a:t>▸  </a:t>
+              <a:t>✓  </a:t>
             </a:r>
             <a:r>
               <a:rPr sz="1600" b="0">
@@ -5971,7 +6035,7 @@
                 </a:solidFill>
                 <a:latin typeface="Calibri"/>
               </a:rPr>
-              <a:t>▸  </a:t>
+              <a:t>✓  </a:t>
             </a:r>
             <a:r>
               <a:rPr sz="1600" b="0">
@@ -6065,6 +6129,14 @@
 <file path=ppt/slides/slide6.xml><?xml version="1.0" encoding="utf-8"?>
 <p:sld xmlns:a="http://schemas.openxmlformats.org/drawingml/2006/main" xmlns:p="http://schemas.openxmlformats.org/presentationml/2006/main" xmlns:r="http://schemas.openxmlformats.org/officeDocument/2006/relationships">
   <p:cSld>
+    <p:bg>
+      <p:bgPr>
+        <a:solidFill>
+          <a:srgbClr val="F1ECDD"/>
+        </a:solidFill>
+        <a:effectLst/>
+      </p:bgPr>
+    </p:bg>
     <p:spTree>
       <p:nvGrpSpPr>
         <p:cNvPr id="1" name=""/>
@@ -6140,7 +6212,7 @@
                 </a:solidFill>
                 <a:latin typeface="Calibri"/>
               </a:rPr>
-              <a:t>▸  </a:t>
+              <a:t>✓  </a:t>
             </a:r>
             <a:r>
               <a:rPr sz="1600" b="0">
@@ -6165,7 +6237,7 @@
                 </a:solidFill>
                 <a:latin typeface="Calibri"/>
               </a:rPr>
-              <a:t>▸  </a:t>
+              <a:t>✓  </a:t>
             </a:r>
             <a:r>
               <a:rPr sz="1600" b="0">
@@ -6190,7 +6262,7 @@
                 </a:solidFill>
                 <a:latin typeface="Calibri"/>
               </a:rPr>
-              <a:t>▸  </a:t>
+              <a:t>✓  </a:t>
             </a:r>
             <a:r>
               <a:rPr sz="1600" b="0">
@@ -6284,6 +6356,14 @@
 <file path=ppt/slides/slide7.xml><?xml version="1.0" encoding="utf-8"?>
 <p:sld xmlns:a="http://schemas.openxmlformats.org/drawingml/2006/main" xmlns:p="http://schemas.openxmlformats.org/presentationml/2006/main" xmlns:r="http://schemas.openxmlformats.org/officeDocument/2006/relationships">
   <p:cSld>
+    <p:bg>
+      <p:bgPr>
+        <a:solidFill>
+          <a:srgbClr val="F1ECDD"/>
+        </a:solidFill>
+        <a:effectLst/>
+      </p:bgPr>
+    </p:bg>
     <p:spTree>
       <p:nvGrpSpPr>
         <p:cNvPr id="1" name=""/>
@@ -6359,7 +6439,7 @@
                 </a:solidFill>
                 <a:latin typeface="Calibri"/>
               </a:rPr>
-              <a:t>▸  </a:t>
+              <a:t>✓  </a:t>
             </a:r>
             <a:r>
               <a:rPr sz="1600" b="0">
@@ -6384,7 +6464,7 @@
                 </a:solidFill>
                 <a:latin typeface="Calibri"/>
               </a:rPr>
-              <a:t>▸  </a:t>
+              <a:t>✓  </a:t>
             </a:r>
             <a:r>
               <a:rPr sz="1600" b="0">
@@ -6409,7 +6489,7 @@
                 </a:solidFill>
                 <a:latin typeface="Calibri"/>
               </a:rPr>
-              <a:t>▸  </a:t>
+              <a:t>✓  </a:t>
             </a:r>
             <a:r>
               <a:rPr sz="1600" b="0">
@@ -6503,6 +6583,14 @@
 <file path=ppt/slides/slide8.xml><?xml version="1.0" encoding="utf-8"?>
 <p:sld xmlns:a="http://schemas.openxmlformats.org/drawingml/2006/main" xmlns:p="http://schemas.openxmlformats.org/presentationml/2006/main" xmlns:r="http://schemas.openxmlformats.org/officeDocument/2006/relationships">
   <p:cSld>
+    <p:bg>
+      <p:bgPr>
+        <a:solidFill>
+          <a:srgbClr val="F1ECDD"/>
+        </a:solidFill>
+        <a:effectLst/>
+      </p:bgPr>
+    </p:bg>
     <p:spTree>
       <p:nvGrpSpPr>
         <p:cNvPr id="1" name=""/>
@@ -6578,7 +6666,7 @@
                 </a:solidFill>
                 <a:latin typeface="Calibri"/>
               </a:rPr>
-              <a:t>▸  </a:t>
+              <a:t>✓  </a:t>
             </a:r>
             <a:r>
               <a:rPr sz="1600" b="0">
@@ -6603,7 +6691,7 @@
                 </a:solidFill>
                 <a:latin typeface="Calibri"/>
               </a:rPr>
-              <a:t>▸  </a:t>
+              <a:t>✓  </a:t>
             </a:r>
             <a:r>
               <a:rPr sz="1600" b="0">
@@ -6628,7 +6716,7 @@
                 </a:solidFill>
                 <a:latin typeface="Calibri"/>
               </a:rPr>
-              <a:t>▸  </a:t>
+              <a:t>✓  </a:t>
             </a:r>
             <a:r>
               <a:rPr sz="1600" b="0">
@@ -6722,6 +6810,14 @@
 <file path=ppt/slides/slide9.xml><?xml version="1.0" encoding="utf-8"?>
 <p:sld xmlns:a="http://schemas.openxmlformats.org/drawingml/2006/main" xmlns:p="http://schemas.openxmlformats.org/presentationml/2006/main" xmlns:r="http://schemas.openxmlformats.org/officeDocument/2006/relationships">
   <p:cSld>
+    <p:bg>
+      <p:bgPr>
+        <a:solidFill>
+          <a:srgbClr val="F1ECDD"/>
+        </a:solidFill>
+        <a:effectLst/>
+      </p:bgPr>
+    </p:bg>
     <p:spTree>
       <p:nvGrpSpPr>
         <p:cNvPr id="1" name=""/>
@@ -6797,7 +6893,7 @@
                 </a:solidFill>
                 <a:latin typeface="Calibri"/>
               </a:rPr>
-              <a:t>▸  </a:t>
+              <a:t>✓  </a:t>
             </a:r>
             <a:r>
               <a:rPr sz="1600" b="0">
@@ -6822,7 +6918,7 @@
                 </a:solidFill>
                 <a:latin typeface="Calibri"/>
               </a:rPr>
-              <a:t>▸  </a:t>
+              <a:t>✓  </a:t>
             </a:r>
             <a:r>
               <a:rPr sz="1600" b="0">
@@ -6847,7 +6943,7 @@
                 </a:solidFill>
                 <a:latin typeface="Calibri"/>
               </a:rPr>
-              <a:t>▸  </a:t>
+              <a:t>✓  </a:t>
             </a:r>
             <a:r>
               <a:rPr sz="1600" b="0">
